--- a/deliverables/presentation/AI-Customer-Support-Manager-v3.pptx
+++ b/deliverables/presentation/AI-Customer-Support-Manager-v3.pptx
@@ -5286,7 +5286,7 @@
                 <a:ea typeface="Segoe UI"/>
                 <a:cs typeface="Segoe UI"/>
               </a:rPr>
-              <a:t>Демо использует вымышленные данные. Интеграции с реальной NLS нет.</a:t>
+              <a:t>Демо использует вымышленные данные. Интеграции с реальными компаниями нет.</a:t>
             </a:r>
           </a:p>
         </p:txBody>
